--- a/docs/Agentic_Health_Interop_Engineering.pptx
+++ b/docs/Agentic_Health_Interop_Engineering.pptx
@@ -3810,7 +3810,7 @@
               </a:defRPr>
             </a:pPr>
             <a:r>
-              <a:t>FHIR STU3 and CDA Data Atlas coverage</a:t>
+              <a:t>FHIR STU3 and CDA Transformation and Mapping Catalog coverage</a:t>
             </a:r>
           </a:p>
           <a:p>
@@ -9569,7 +9569,7 @@
               </a:defRPr>
             </a:pPr>
             <a:r>
-              <a:t>Data Atlas (1,538 field mappings)</a:t>
+              <a:t>Transformation and Mapping Catalog (1,538 field mappings)</a:t>
             </a:r>
           </a:p>
           <a:p>

--- a/docs/Agentic_Health_Interop_Engineering.pptx
+++ b/docs/Agentic_Health_Interop_Engineering.pptx
@@ -10556,7 +10556,7 @@
               </a:defRPr>
             </a:pPr>
             <a:r>
-              <a:t>Performance: Token Optimization Results</a:t>
+              <a:t>Performance: Measured Token Usage</a:t>
             </a:r>
           </a:p>
         </p:txBody>
@@ -10671,7 +10671,7 @@
               </a:defRPr>
             </a:pPr>
             <a:r>
-              <a:t>Before</a:t>
+              <a:t>Measured</a:t>
             </a:r>
           </a:p>
         </p:txBody>
@@ -10707,7 +10707,7 @@
               </a:defRPr>
             </a:pPr>
             <a:r>
-              <a:t>After</a:t>
+              <a:t>Context</a:t>
             </a:r>
           </a:p>
         </p:txBody>
@@ -10743,7 +10743,7 @@
               </a:defRPr>
             </a:pPr>
             <a:r>
-              <a:t>Improvement</a:t>
+              <a:t>Source</a:t>
             </a:r>
           </a:p>
         </p:txBody>
@@ -10822,7 +10822,7 @@
               </a:defRPr>
             </a:pPr>
             <a:r>
-              <a:t>Tool catalog tokens</a:t>
+              <a:t>Simple query (total)</a:t>
             </a:r>
           </a:p>
         </p:txBody>
@@ -10858,7 +10858,7 @@
               </a:defRPr>
             </a:pPr>
             <a:r>
-              <a:t>~15K</a:t>
+              <a:t>16,690</a:t>
             </a:r>
           </a:p>
         </p:txBody>
@@ -10894,7 +10894,7 @@
               </a:defRPr>
             </a:pPr>
             <a:r>
-              <a:t>~10K</a:t>
+              <a:t>14 seconds</a:t>
             </a:r>
           </a:p>
         </p:txBody>
@@ -10930,7 +10930,7 @@
               </a:defRPr>
             </a:pPr>
             <a:r>
-              <a:t>-33%</a:t>
+              <a:t>Measured</a:t>
             </a:r>
           </a:p>
         </p:txBody>
@@ -11009,7 +11009,7 @@
               </a:defRPr>
             </a:pPr>
             <a:r>
-              <a:t>System prompt tokens</a:t>
+              <a:t>Planning turn (ADT build)</a:t>
             </a:r>
           </a:p>
         </p:txBody>
@@ -11045,7 +11045,7 @@
               </a:defRPr>
             </a:pPr>
             <a:r>
-              <a:t>~5K</a:t>
+              <a:t>32,794</a:t>
             </a:r>
           </a:p>
         </p:txBody>
@@ -11081,7 +11081,7 @@
               </a:defRPr>
             </a:pPr>
             <a:r>
-              <a:t>~2K</a:t>
+              <a:t>25 seconds</a:t>
             </a:r>
           </a:p>
         </p:txBody>
@@ -11117,7 +11117,7 @@
               </a:defRPr>
             </a:pPr>
             <a:r>
-              <a:t>-60%</a:t>
+              <a:t>Measured</a:t>
             </a:r>
           </a:p>
         </p:txBody>
@@ -11196,7 +11196,7 @@
               </a:defRPr>
             </a:pPr>
             <a:r>
-              <a:t>Simple query (total)</a:t>
+              <a:t>Full build (est. 3-5 turns)</a:t>
             </a:r>
           </a:p>
         </p:txBody>
@@ -11232,7 +11232,7 @@
               </a:defRPr>
             </a:pPr>
             <a:r>
-              <a:t>~25K</a:t>
+              <a:t>80-150K</a:t>
             </a:r>
           </a:p>
         </p:txBody>
@@ -11268,7 +11268,7 @@
               </a:defRPr>
             </a:pPr>
             <a:r>
-              <a:t>~15K</a:t>
+              <a:t>2-5 minutes</a:t>
             </a:r>
           </a:p>
         </p:txBody>
@@ -11304,7 +11304,7 @@
               </a:defRPr>
             </a:pPr>
             <a:r>
-              <a:t>-40%</a:t>
+              <a:t>Estimated</a:t>
             </a:r>
           </a:p>
         </p:txBody>
@@ -11383,7 +11383,7 @@
               </a:defRPr>
             </a:pPr>
             <a:r>
-              <a:t>Complex task (total)</a:t>
+              <a:t>Cost per build (Bedrock)</a:t>
             </a:r>
           </a:p>
         </p:txBody>
@@ -11419,7 +11419,7 @@
               </a:defRPr>
             </a:pPr>
             <a:r>
-              <a:t>~120K</a:t>
+              <a:t>$0.30-$0.75</a:t>
             </a:r>
           </a:p>
         </p:txBody>
@@ -11455,7 +11455,7 @@
               </a:defRPr>
             </a:pPr>
             <a:r>
-              <a:t>~50K</a:t>
+              <a:t>vs. 2-3 days labor</a:t>
             </a:r>
           </a:p>
         </p:txBody>
@@ -11491,7 +11491,7 @@
               </a:defRPr>
             </a:pPr>
             <a:r>
-              <a:t>-58%</a:t>
+              <a:t>Calculated</a:t>
             </a:r>
           </a:p>
         </p:txBody>
@@ -11570,7 +11570,7 @@
               </a:defRPr>
             </a:pPr>
             <a:r>
-              <a:t>Simple query latency</a:t>
+              <a:t>Tools called per turn</a:t>
             </a:r>
           </a:p>
         </p:txBody>
@@ -11606,7 +11606,7 @@
               </a:defRPr>
             </a:pPr>
             <a:r>
-              <a:t>8-12s</a:t>
+              <a:t>2-6</a:t>
             </a:r>
           </a:p>
         </p:txBody>
@@ -11642,7 +11642,7 @@
               </a:defRPr>
             </a:pPr>
             <a:r>
-              <a:t>3-5s</a:t>
+              <a:t>42 available</a:t>
             </a:r>
           </a:p>
         </p:txBody>
@@ -11678,7 +11678,7 @@
               </a:defRPr>
             </a:pPr>
             <a:r>
-              <a:t>-60%</a:t>
+              <a:t>Measured</a:t>
             </a:r>
           </a:p>
         </p:txBody>
@@ -11757,7 +11757,7 @@
               </a:defRPr>
             </a:pPr>
             <a:r>
-              <a:t>Complex task latency</a:t>
+              <a:t>Skills loaded per build</a:t>
             </a:r>
           </a:p>
         </p:txBody>
@@ -11793,7 +11793,7 @@
               </a:defRPr>
             </a:pPr>
             <a:r>
-              <a:t>90s+</a:t>
+              <a:t>3-5</a:t>
             </a:r>
           </a:p>
         </p:txBody>
@@ -11829,7 +11829,7 @@
               </a:defRPr>
             </a:pPr>
             <a:r>
-              <a:t>45-60s</a:t>
+              <a:t>of 12 total</a:t>
             </a:r>
           </a:p>
         </p:txBody>
@@ -11865,7 +11865,7 @@
               </a:defRPr>
             </a:pPr>
             <a:r>
-              <a:t>-40%</a:t>
+              <a:t>On-demand</a:t>
             </a:r>
           </a:p>
         </p:txBody>
@@ -11901,7 +11901,7 @@
               </a:defRPr>
             </a:pPr>
             <a:r>
-              <a:t>Six optimization strategies applied:</a:t>
+              <a:t>Cost control strategies (all implemented and active):</a:t>
             </a:r>
           </a:p>
         </p:txBody>
@@ -11937,7 +11937,7 @@
               </a:defRPr>
             </a:pPr>
             <a:r>
-              <a:t>ToolFilter policy: strips 15 framework waste tools before each LLM call</a:t>
+              <a:t>ToolFilter policy: strips FileSystem, SQL, Shell tools from LLM catalog on every turn</a:t>
             </a:r>
           </a:p>
         </p:txBody>
@@ -11973,7 +11973,7 @@
               </a:defRPr>
             </a:pPr>
             <a:r>
-              <a:t>Concise tool descriptions: imperative contracts instead of verbose explanations</a:t>
+              <a:t>On-demand skills: only the domains the task needs are loaded (e.g. ADT build loads 4 of 12)</a:t>
             </a:r>
           </a:p>
         </p:txBody>
@@ -12009,7 +12009,7 @@
               </a:defRPr>
             </a:pPr>
             <a:r>
-              <a:t>No markdown in responses: eliminates rendering bugs in chat UI</a:t>
+              <a:t>Monitor token budget: 100K cap per turn prevents runaway costs on stuck iterations</a:t>
             </a:r>
           </a:p>
         </p:txBody>
@@ -12045,7 +12045,7 @@
               </a:defRPr>
             </a:pPr>
             <a:r>
-              <a:t>Monitor token budget: 50K cap per turn prevents runaway costs</a:t>
+              <a:t>Rate-limit retry: exponential backoff on Bedrock 429s (30s/60s/90s) with user-visible status</a:t>
             </a:r>
           </a:p>
         </p:txBody>
@@ -12081,7 +12081,7 @@
               </a:defRPr>
             </a:pPr>
             <a:r>
-              <a:t>Multi-turn task decomposition: research -&gt; propose -&gt; build -&gt; validate -&gt; report</a:t>
+              <a:t>Compact system prompt: &lt; 2K tokens. Domain knowledge lives in Skills, not in the base prompt</a:t>
             </a:r>
           </a:p>
         </p:txBody>
@@ -12117,7 +12117,7 @@
               </a:defRPr>
             </a:pPr>
             <a:r>
-              <a:t>Compact system prompt: &lt; 2K tokens; domain knowledge lives in Skills, not in prompt</a:t>
+              <a:t>Fabrication guard: detects claims without tool calls and forces retry before reporting success</a:t>
             </a:r>
           </a:p>
         </p:txBody>
